--- a/ppt/Antarctic_Traverse.pptx
+++ b/ppt/Antarctic_Traverse.pptx
@@ -261,7 +261,7 @@
             <a:fld id="{C4D5ADD5-2BBC-4A94-8F86-D9013941F742}" type="datetimeFigureOut">
               <a:rPr lang="en-US"/>
               <a:pPr/>
-              <a:t>9/1/2026</a:t>
+              <a:t>9/2/2026</a:t>
             </a:fld>
             <a:endParaRPr lang="en-US"/>
           </a:p>
@@ -1569,7 +1569,7 @@
           <a:p>
             <a:fld id="{E60792E3-D524-454C-8AFD-A91972900BCB}" type="datetime1">
               <a:rPr lang="en-US" smtClean="0"/>
-              <a:t>9/1/2026</a:t>
+              <a:t>9/2/2026</a:t>
             </a:fld>
             <a:endParaRPr lang="en-US"/>
           </a:p>
@@ -1751,7 +1751,7 @@
           <a:p>
             <a:fld id="{053C3A68-6922-42D3-8905-ECC2D82A3469}" type="datetime1">
               <a:rPr lang="en-US" smtClean="0"/>
-              <a:t>9/1/2026</a:t>
+              <a:t>9/2/2026</a:t>
             </a:fld>
             <a:endParaRPr lang="en-US"/>
           </a:p>
@@ -1943,7 +1943,7 @@
           <a:p>
             <a:fld id="{CB69E9F4-7604-4950-A8B2-8ACDEDB1506E}" type="datetime1">
               <a:rPr lang="en-US" smtClean="0"/>
-              <a:t>9/1/2026</a:t>
+              <a:t>9/2/2026</a:t>
             </a:fld>
             <a:endParaRPr lang="en-US"/>
           </a:p>
@@ -2125,7 +2125,7 @@
           <a:p>
             <a:fld id="{708B7524-32A2-4C20-A58C-BC3BAA1042FC}" type="datetime1">
               <a:rPr lang="en-US" smtClean="0"/>
-              <a:t>9/1/2026</a:t>
+              <a:t>9/2/2026</a:t>
             </a:fld>
             <a:endParaRPr lang="en-US"/>
           </a:p>
@@ -2384,7 +2384,7 @@
           <a:p>
             <a:fld id="{1E994447-D6B2-43BB-A877-57F1A267B999}" type="datetime1">
               <a:rPr lang="en-US" smtClean="0"/>
-              <a:t>9/1/2026</a:t>
+              <a:t>9/2/2026</a:t>
             </a:fld>
             <a:endParaRPr lang="en-US"/>
           </a:p>
@@ -2683,7 +2683,7 @@
           <a:p>
             <a:fld id="{68920E16-BD35-483C-AA6B-346FC7E46DEA}" type="datetime1">
               <a:rPr lang="en-US" smtClean="0"/>
-              <a:t>9/1/2026</a:t>
+              <a:t>9/2/2026</a:t>
             </a:fld>
             <a:endParaRPr lang="en-US"/>
           </a:p>
@@ -3116,7 +3116,7 @@
           <a:p>
             <a:fld id="{2FEAC6F8-5103-4FC0-A69E-5C6AE6469DA8}" type="datetime1">
               <a:rPr lang="en-US" smtClean="0"/>
-              <a:t>9/1/2026</a:t>
+              <a:t>9/2/2026</a:t>
             </a:fld>
             <a:endParaRPr lang="en-US"/>
           </a:p>
@@ -3247,7 +3247,7 @@
           <a:p>
             <a:fld id="{C60C6921-0627-4C8F-83D5-0CF936D2FFDD}" type="datetime1">
               <a:rPr lang="en-US" smtClean="0"/>
-              <a:t>9/1/2026</a:t>
+              <a:t>9/2/2026</a:t>
             </a:fld>
             <a:endParaRPr lang="en-US"/>
           </a:p>
@@ -3356,7 +3356,7 @@
           <a:p>
             <a:fld id="{2FF08AD7-8103-40F8-983C-E2BA6BB9CBE0}" type="datetime1">
               <a:rPr lang="en-US" smtClean="0"/>
-              <a:t>9/1/2026</a:t>
+              <a:t>9/2/2026</a:t>
             </a:fld>
             <a:endParaRPr lang="en-US"/>
           </a:p>
@@ -3645,7 +3645,7 @@
           <a:p>
             <a:fld id="{DF8C06B4-9380-4A4D-AF49-A3596E17DAF5}" type="datetime1">
               <a:rPr lang="en-US" smtClean="0"/>
-              <a:t>9/1/2026</a:t>
+              <a:t>9/2/2026</a:t>
             </a:fld>
             <a:endParaRPr lang="en-US"/>
           </a:p>
@@ -3914,7 +3914,7 @@
           <a:p>
             <a:fld id="{EF7FDEF1-C582-4E22-9E77-D68326471F28}" type="datetime1">
               <a:rPr lang="en-US" smtClean="0"/>
-              <a:t>9/1/2026</a:t>
+              <a:t>9/2/2026</a:t>
             </a:fld>
             <a:endParaRPr lang="en-US"/>
           </a:p>
@@ -4157,7 +4157,7 @@
           <a:p>
             <a:fld id="{780A9602-A9A9-453F-AEF1-37B5837E02CD}" type="datetime1">
               <a:rPr lang="en-US" smtClean="0"/>
-              <a:t>9/1/2026</a:t>
+              <a:t>9/2/2026</a:t>
             </a:fld>
             <a:endParaRPr lang="en-US"/>
           </a:p>
@@ -5844,10 +5844,10 @@
       </p:pic>
       <p:pic>
         <p:nvPicPr>
-          <p:cNvPr id="7" name="Picture 6">
+          <p:cNvPr id="6" name="Picture 5">
             <a:extLst>
               <a:ext uri="{FF2B5EF4-FFF2-40B4-BE49-F238E27FC236}">
-                <a16:creationId xmlns:a16="http://schemas.microsoft.com/office/drawing/2014/main" id="{14D8B8CA-0456-4606-D5CA-94E2D4BDD89C}"/>
+                <a16:creationId xmlns:a16="http://schemas.microsoft.com/office/drawing/2014/main" id="{71D50BFC-1BBF-97DC-9594-EE4182CEB364}"/>
               </a:ext>
             </a:extLst>
           </p:cNvPr>
@@ -5864,8 +5864,8 @@
         </p:blipFill>
         <p:spPr>
           <a:xfrm>
-            <a:off x="1" y="219381"/>
-            <a:ext cx="1831521" cy="626573"/>
+            <a:off x="0" y="204327"/>
+            <a:ext cx="1625127" cy="614282"/>
           </a:xfrm>
           <a:prstGeom prst="rect">
             <a:avLst/>
@@ -6353,10 +6353,10 @@
       </p:pic>
       <p:pic>
         <p:nvPicPr>
-          <p:cNvPr id="13" name="Picture 12">
+          <p:cNvPr id="2" name="Picture 1">
             <a:extLst>
               <a:ext uri="{FF2B5EF4-FFF2-40B4-BE49-F238E27FC236}">
-                <a16:creationId xmlns:a16="http://schemas.microsoft.com/office/drawing/2014/main" id="{D170CDBF-3CFA-A9C9-FD88-31920A73F6FC}"/>
+                <a16:creationId xmlns:a16="http://schemas.microsoft.com/office/drawing/2014/main" id="{2717F5DE-6292-307F-5BB1-44AE33522704}"/>
               </a:ext>
             </a:extLst>
           </p:cNvPr>
@@ -6373,8 +6373,8 @@
         </p:blipFill>
         <p:spPr>
           <a:xfrm>
-            <a:off x="1" y="219381"/>
-            <a:ext cx="1831521" cy="626573"/>
+            <a:off x="0" y="204327"/>
+            <a:ext cx="1625127" cy="614282"/>
           </a:xfrm>
           <a:prstGeom prst="rect">
             <a:avLst/>
@@ -7141,10 +7141,10 @@
       </p:sp>
       <p:pic>
         <p:nvPicPr>
-          <p:cNvPr id="2" name="Picture 1">
+          <p:cNvPr id="3" name="Picture 2">
             <a:extLst>
               <a:ext uri="{FF2B5EF4-FFF2-40B4-BE49-F238E27FC236}">
-                <a16:creationId xmlns:a16="http://schemas.microsoft.com/office/drawing/2014/main" id="{E0E715B6-FCEB-528E-0698-2E73387F0FEA}"/>
+                <a16:creationId xmlns:a16="http://schemas.microsoft.com/office/drawing/2014/main" id="{56D6C12C-AC7E-7253-0643-CCB314183EDA}"/>
               </a:ext>
             </a:extLst>
           </p:cNvPr>
@@ -7161,8 +7161,8 @@
         </p:blipFill>
         <p:spPr>
           <a:xfrm>
-            <a:off x="0" y="219381"/>
-            <a:ext cx="1831521" cy="626573"/>
+            <a:off x="0" y="204327"/>
+            <a:ext cx="1625127" cy="614282"/>
           </a:xfrm>
           <a:prstGeom prst="rect">
             <a:avLst/>
@@ -7604,10 +7604,10 @@
       </p:pic>
       <p:pic>
         <p:nvPicPr>
-          <p:cNvPr id="3" name="Picture 2">
+          <p:cNvPr id="2" name="Picture 1">
             <a:extLst>
               <a:ext uri="{FF2B5EF4-FFF2-40B4-BE49-F238E27FC236}">
-                <a16:creationId xmlns:a16="http://schemas.microsoft.com/office/drawing/2014/main" id="{D1573628-F6CE-F5E2-8182-266CF97C0BF6}"/>
+                <a16:creationId xmlns:a16="http://schemas.microsoft.com/office/drawing/2014/main" id="{32E226AF-502E-5889-B66F-ACE673419E8F}"/>
               </a:ext>
             </a:extLst>
           </p:cNvPr>
@@ -7624,8 +7624,8 @@
         </p:blipFill>
         <p:spPr>
           <a:xfrm>
-            <a:off x="0" y="219381"/>
-            <a:ext cx="1831521" cy="626573"/>
+            <a:off x="0" y="204327"/>
+            <a:ext cx="1625127" cy="614282"/>
           </a:xfrm>
           <a:prstGeom prst="rect">
             <a:avLst/>
@@ -8045,10 +8045,10 @@
       </p:pic>
       <p:pic>
         <p:nvPicPr>
-          <p:cNvPr id="3" name="Picture 2">
+          <p:cNvPr id="2" name="Picture 1">
             <a:extLst>
               <a:ext uri="{FF2B5EF4-FFF2-40B4-BE49-F238E27FC236}">
-                <a16:creationId xmlns:a16="http://schemas.microsoft.com/office/drawing/2014/main" id="{C74EC4D3-B6CA-298C-8981-980DF6BB33C0}"/>
+                <a16:creationId xmlns:a16="http://schemas.microsoft.com/office/drawing/2014/main" id="{941D96FE-0E2A-58BF-1830-E32973718C68}"/>
               </a:ext>
             </a:extLst>
           </p:cNvPr>
@@ -8065,8 +8065,8 @@
         </p:blipFill>
         <p:spPr>
           <a:xfrm>
-            <a:off x="0" y="219381"/>
-            <a:ext cx="1831521" cy="626573"/>
+            <a:off x="0" y="204327"/>
+            <a:ext cx="1625127" cy="614282"/>
           </a:xfrm>
           <a:prstGeom prst="rect">
             <a:avLst/>
@@ -8769,10 +8769,10 @@
       </p:pic>
       <p:pic>
         <p:nvPicPr>
-          <p:cNvPr id="3" name="Picture 2">
+          <p:cNvPr id="2" name="Picture 1">
             <a:extLst>
               <a:ext uri="{FF2B5EF4-FFF2-40B4-BE49-F238E27FC236}">
-                <a16:creationId xmlns:a16="http://schemas.microsoft.com/office/drawing/2014/main" id="{B3213539-D619-5651-A048-2CB6B7DEFC12}"/>
+                <a16:creationId xmlns:a16="http://schemas.microsoft.com/office/drawing/2014/main" id="{78BA5C44-B32F-DF87-1702-3DA5220986F1}"/>
               </a:ext>
             </a:extLst>
           </p:cNvPr>
@@ -8789,8 +8789,8 @@
         </p:blipFill>
         <p:spPr>
           <a:xfrm>
-            <a:off x="0" y="219381"/>
-            <a:ext cx="1831521" cy="626573"/>
+            <a:off x="0" y="204327"/>
+            <a:ext cx="1625127" cy="614282"/>
           </a:xfrm>
           <a:prstGeom prst="rect">
             <a:avLst/>

--- a/ppt/Antarctic_Traverse.pptx
+++ b/ppt/Antarctic_Traverse.pptx
@@ -5803,7 +5803,14 @@
                 <a:latin typeface="Arial" panose="020B0604020202020204" pitchFamily="34" charset="0"/>
                 <a:cs typeface="Arial" panose="020B0604020202020204" pitchFamily="34" charset="0"/>
               </a:rPr>
-              <a:t>Team Name: Odyssey Prime</a:t>
+              <a:t>Team Name: </a:t>
+            </a:r>
+            <a:r>
+              <a:rPr lang="en-US" sz="2000" b="1" dirty="0" err="1">
+                <a:latin typeface="Arial" panose="020B0604020202020204" pitchFamily="34" charset="0"/>
+                <a:cs typeface="Arial" panose="020B0604020202020204" pitchFamily="34" charset="0"/>
+              </a:rPr>
+              <a:t>LimitLess</a:t>
             </a:r>
             <a:endParaRPr lang="en-IN" sz="2000" b="1" dirty="0">
               <a:latin typeface="Arial" panose="020B0604020202020204" pitchFamily="34" charset="0"/>
@@ -5864,8 +5871,8 @@
         </p:blipFill>
         <p:spPr>
           <a:xfrm>
-            <a:off x="0" y="204327"/>
-            <a:ext cx="1625127" cy="614282"/>
+            <a:off x="0" y="186165"/>
+            <a:ext cx="1721224" cy="650606"/>
           </a:xfrm>
           <a:prstGeom prst="rect">
             <a:avLst/>
@@ -6353,10 +6360,10 @@
       </p:pic>
       <p:pic>
         <p:nvPicPr>
-          <p:cNvPr id="2" name="Picture 1">
+          <p:cNvPr id="3" name="Picture 2">
             <a:extLst>
               <a:ext uri="{FF2B5EF4-FFF2-40B4-BE49-F238E27FC236}">
-                <a16:creationId xmlns:a16="http://schemas.microsoft.com/office/drawing/2014/main" id="{2717F5DE-6292-307F-5BB1-44AE33522704}"/>
+                <a16:creationId xmlns:a16="http://schemas.microsoft.com/office/drawing/2014/main" id="{D9151969-F2D0-9FBD-5736-B8270B1CFE42}"/>
               </a:ext>
             </a:extLst>
           </p:cNvPr>
@@ -6373,8 +6380,8 @@
         </p:blipFill>
         <p:spPr>
           <a:xfrm>
-            <a:off x="0" y="204327"/>
-            <a:ext cx="1625127" cy="614282"/>
+            <a:off x="0" y="186165"/>
+            <a:ext cx="1721224" cy="650606"/>
           </a:xfrm>
           <a:prstGeom prst="rect">
             <a:avLst/>
@@ -7141,10 +7148,10 @@
       </p:sp>
       <p:pic>
         <p:nvPicPr>
-          <p:cNvPr id="3" name="Picture 2">
+          <p:cNvPr id="4" name="Picture 3">
             <a:extLst>
               <a:ext uri="{FF2B5EF4-FFF2-40B4-BE49-F238E27FC236}">
-                <a16:creationId xmlns:a16="http://schemas.microsoft.com/office/drawing/2014/main" id="{56D6C12C-AC7E-7253-0643-CCB314183EDA}"/>
+                <a16:creationId xmlns:a16="http://schemas.microsoft.com/office/drawing/2014/main" id="{9EA93488-05C1-08AF-EB1E-A752E9418EB7}"/>
               </a:ext>
             </a:extLst>
           </p:cNvPr>
@@ -7161,8 +7168,8 @@
         </p:blipFill>
         <p:spPr>
           <a:xfrm>
-            <a:off x="0" y="204327"/>
-            <a:ext cx="1625127" cy="614282"/>
+            <a:off x="0" y="186165"/>
+            <a:ext cx="1721224" cy="650606"/>
           </a:xfrm>
           <a:prstGeom prst="rect">
             <a:avLst/>
@@ -7604,10 +7611,10 @@
       </p:pic>
       <p:pic>
         <p:nvPicPr>
-          <p:cNvPr id="2" name="Picture 1">
+          <p:cNvPr id="4" name="Picture 3">
             <a:extLst>
               <a:ext uri="{FF2B5EF4-FFF2-40B4-BE49-F238E27FC236}">
-                <a16:creationId xmlns:a16="http://schemas.microsoft.com/office/drawing/2014/main" id="{32E226AF-502E-5889-B66F-ACE673419E8F}"/>
+                <a16:creationId xmlns:a16="http://schemas.microsoft.com/office/drawing/2014/main" id="{BE777A82-E8E0-B1AE-EA93-D4A02972A572}"/>
               </a:ext>
             </a:extLst>
           </p:cNvPr>
@@ -7624,8 +7631,8 @@
         </p:blipFill>
         <p:spPr>
           <a:xfrm>
-            <a:off x="0" y="204327"/>
-            <a:ext cx="1625127" cy="614282"/>
+            <a:off x="0" y="186165"/>
+            <a:ext cx="1721224" cy="650606"/>
           </a:xfrm>
           <a:prstGeom prst="rect">
             <a:avLst/>
@@ -8045,10 +8052,10 @@
       </p:pic>
       <p:pic>
         <p:nvPicPr>
-          <p:cNvPr id="2" name="Picture 1">
+          <p:cNvPr id="4" name="Picture 3">
             <a:extLst>
               <a:ext uri="{FF2B5EF4-FFF2-40B4-BE49-F238E27FC236}">
-                <a16:creationId xmlns:a16="http://schemas.microsoft.com/office/drawing/2014/main" id="{941D96FE-0E2A-58BF-1830-E32973718C68}"/>
+                <a16:creationId xmlns:a16="http://schemas.microsoft.com/office/drawing/2014/main" id="{E5B58413-4147-22D3-9DE2-45C09B3573B5}"/>
               </a:ext>
             </a:extLst>
           </p:cNvPr>
@@ -8065,8 +8072,8 @@
         </p:blipFill>
         <p:spPr>
           <a:xfrm>
-            <a:off x="0" y="204327"/>
-            <a:ext cx="1625127" cy="614282"/>
+            <a:off x="0" y="186165"/>
+            <a:ext cx="1721224" cy="650606"/>
           </a:xfrm>
           <a:prstGeom prst="rect">
             <a:avLst/>
@@ -8769,10 +8776,10 @@
       </p:pic>
       <p:pic>
         <p:nvPicPr>
-          <p:cNvPr id="2" name="Picture 1">
+          <p:cNvPr id="4" name="Picture 3">
             <a:extLst>
               <a:ext uri="{FF2B5EF4-FFF2-40B4-BE49-F238E27FC236}">
-                <a16:creationId xmlns:a16="http://schemas.microsoft.com/office/drawing/2014/main" id="{78BA5C44-B32F-DF87-1702-3DA5220986F1}"/>
+                <a16:creationId xmlns:a16="http://schemas.microsoft.com/office/drawing/2014/main" id="{F8BC37BA-8F82-59BA-289F-6C24C445B868}"/>
               </a:ext>
             </a:extLst>
           </p:cNvPr>
@@ -8789,8 +8796,8 @@
         </p:blipFill>
         <p:spPr>
           <a:xfrm>
-            <a:off x="0" y="204327"/>
-            <a:ext cx="1625127" cy="614282"/>
+            <a:off x="0" y="186165"/>
+            <a:ext cx="1721224" cy="650606"/>
           </a:xfrm>
           <a:prstGeom prst="rect">
             <a:avLst/>
